--- a/06_ppt/template.pptx
+++ b/06_ppt/template.pptx
@@ -6,6 +6,7 @@
   </p:sldMasterIdLst>
   <p:sldIdLst>
     <p:sldId id="256" r:id="rId2"/>
+    <p:sldId id="259" r:id="rId3"/>
   </p:sldIdLst>
   <p:sldSz cx="12192000" cy="6858000"/>
   <p:notesSz cx="6858000" cy="9144000"/>
@@ -268,7 +269,7 @@
           <a:p>
             <a:fld id="{96ECACCA-3741-0D40-A94E-41DBB1D0486F}" type="datetimeFigureOut">
               <a:rPr kumimoji="1" lang="ko-KR" altLang="en-US" smtClean="0"/>
-              <a:t>2026. 8. 16.</a:t>
+              <a:t>2026. 8. 19.</a:t>
             </a:fld>
             <a:endParaRPr kumimoji="1" lang="ko-KR" altLang="en-US"/>
           </a:p>
@@ -575,7 +576,7 @@
           <a:p>
             <a:fld id="{96ECACCA-3741-0D40-A94E-41DBB1D0486F}" type="datetimeFigureOut">
               <a:rPr kumimoji="1" lang="ko-KR" altLang="en-US" smtClean="0"/>
-              <a:t>2026. 8. 16.</a:t>
+              <a:t>2026. 8. 19.</a:t>
             </a:fld>
             <a:endParaRPr kumimoji="1" lang="ko-KR" altLang="en-US"/>
           </a:p>
@@ -712,7 +713,7 @@
           <a:p>
             <a:fld id="{96ECACCA-3741-0D40-A94E-41DBB1D0486F}" type="datetimeFigureOut">
               <a:rPr kumimoji="1" lang="ko-KR" altLang="en-US" smtClean="0"/>
-              <a:t>2026. 8. 16.</a:t>
+              <a:t>2026. 8. 19.</a:t>
             </a:fld>
             <a:endParaRPr kumimoji="1" lang="ko-KR" altLang="en-US"/>
           </a:p>
@@ -859,7 +860,7 @@
           <a:p>
             <a:fld id="{96ECACCA-3741-0D40-A94E-41DBB1D0486F}" type="datetimeFigureOut">
               <a:rPr kumimoji="1" lang="ko-KR" altLang="en-US" smtClean="0"/>
-              <a:t>2026. 8. 16.</a:t>
+              <a:t>2026. 8. 19.</a:t>
             </a:fld>
             <a:endParaRPr kumimoji="1" lang="ko-KR" altLang="en-US"/>
           </a:p>
@@ -1257,7 +1258,7 @@
           <a:p>
             <a:fld id="{311ED3F7-D977-4046-97E6-A3D7881A4583}" type="datetime1">
               <a:rPr kumimoji="1" lang="ko-KR" altLang="en-US" smtClean="0"/>
-              <a:t>2026. 8. 16.</a:t>
+              <a:t>2026. 8. 19.</a:t>
             </a:fld>
             <a:endParaRPr kumimoji="1" lang="ko-KR" altLang="en-US" dirty="0"/>
           </a:p>
@@ -1597,7 +1598,7 @@
 </file>
 
 <file path=ppt/slideLayouts/slideLayout2.xml><?xml version="1.0" encoding="utf-8"?>
-<p:sldLayout xmlns:a="http://schemas.openxmlformats.org/drawingml/2006/main" xmlns:r="http://schemas.openxmlformats.org/officeDocument/2006/relationships" xmlns:p="http://schemas.openxmlformats.org/presentationml/2006/main" preserve="1">
+<p:sldLayout xmlns:a="http://schemas.openxmlformats.org/drawingml/2006/main" xmlns:r="http://schemas.openxmlformats.org/officeDocument/2006/relationships" xmlns:p="http://schemas.openxmlformats.org/presentationml/2006/main" preserve="1" userDrawn="1">
   <p:cSld name="제목 및 내용">
     <p:spTree>
       <p:nvGrpSpPr>
@@ -1623,7 +1624,12 @@
             <p:ph idx="1" hasCustomPrompt="1"/>
           </p:nvPr>
         </p:nvSpPr>
-        <p:spPr/>
+        <p:spPr>
+          <a:xfrm>
+            <a:off x="720000" y="1252330"/>
+            <a:ext cx="10633800" cy="4949502"/>
+          </a:xfrm>
+        </p:spPr>
         <p:txBody>
           <a:bodyPr/>
           <a:lstStyle>
@@ -1679,7 +1685,7 @@
           <a:p>
             <a:fld id="{96ECACCA-3741-0D40-A94E-41DBB1D0486F}" type="datetimeFigureOut">
               <a:rPr kumimoji="1" lang="ko-KR" altLang="en-US" smtClean="0"/>
-              <a:t>2026. 8. 16.</a:t>
+              <a:t>2026. 8. 19.</a:t>
             </a:fld>
             <a:endParaRPr kumimoji="1" lang="ko-KR" altLang="en-US"/>
           </a:p>
@@ -1740,6 +1746,57 @@
               <a:t>마스터 제목 스타일 편집</a:t>
             </a:r>
             <a:endParaRPr kumimoji="1" lang="ko-KR" altLang="en-US" dirty="0"/>
+          </a:p>
+        </p:txBody>
+      </p:sp>
+      <p:sp>
+        <p:nvSpPr>
+          <p:cNvPr id="9" name="내용 개체 틀 2">
+            <a:extLst>
+              <a:ext uri="{FF2B5EF4-FFF2-40B4-BE49-F238E27FC236}">
+                <a16:creationId xmlns:a16="http://schemas.microsoft.com/office/drawing/2014/main" id="{A9BB5037-91DD-915D-51B8-2B0AE69659CF}"/>
+              </a:ext>
+            </a:extLst>
+          </p:cNvPr>
+          <p:cNvSpPr>
+            <a:spLocks noGrp="1"/>
+          </p:cNvSpPr>
+          <p:nvPr>
+            <p:ph idx="13"/>
+          </p:nvPr>
+        </p:nvSpPr>
+        <p:spPr>
+          <a:xfrm>
+            <a:off x="508527" y="758907"/>
+            <a:ext cx="11056746" cy="340051"/>
+          </a:xfrm>
+        </p:spPr>
+        <p:txBody>
+          <a:bodyPr>
+            <a:normAutofit/>
+          </a:bodyPr>
+          <a:lstStyle>
+            <a:lvl1pPr marL="0" indent="0" latinLnBrk="0">
+              <a:lnSpc>
+                <a:spcPct val="100000"/>
+              </a:lnSpc>
+              <a:buNone/>
+              <a:defRPr sz="1800" b="1" i="1">
+                <a:solidFill>
+                  <a:schemeClr val="tx1">
+                    <a:lumMod val="50000"/>
+                    <a:lumOff val="50000"/>
+                  </a:schemeClr>
+                </a:solidFill>
+              </a:defRPr>
+            </a:lvl1pPr>
+          </a:lstStyle>
+          <a:p>
+            <a:pPr lvl="0"/>
+            <a:r>
+              <a:rPr kumimoji="1" lang="ko-KR" altLang="en-US" dirty="0"/>
+              <a:t>마스터 텍스트 스타일을 편집하려면 클릭</a:t>
+            </a:r>
           </a:p>
         </p:txBody>
       </p:sp>
@@ -1844,7 +1901,7 @@
           <a:p>
             <a:fld id="{96ECACCA-3741-0D40-A94E-41DBB1D0486F}" type="datetimeFigureOut">
               <a:rPr kumimoji="1" lang="ko-KR" altLang="en-US" smtClean="0"/>
-              <a:t>2026. 8. 16.</a:t>
+              <a:t>2026. 8. 19.</a:t>
             </a:fld>
             <a:endParaRPr kumimoji="1" lang="ko-KR" altLang="en-US"/>
           </a:p>
@@ -1909,6 +1966,57 @@
               <a:t>마스터 제목 스타일 편집</a:t>
             </a:r>
             <a:endParaRPr kumimoji="1" lang="ko-KR" altLang="en-US" dirty="0"/>
+          </a:p>
+        </p:txBody>
+      </p:sp>
+      <p:sp>
+        <p:nvSpPr>
+          <p:cNvPr id="8" name="내용 개체 틀 2">
+            <a:extLst>
+              <a:ext uri="{FF2B5EF4-FFF2-40B4-BE49-F238E27FC236}">
+                <a16:creationId xmlns:a16="http://schemas.microsoft.com/office/drawing/2014/main" id="{2E0FD76C-36BC-1493-469E-A2ACBE11F62A}"/>
+              </a:ext>
+            </a:extLst>
+          </p:cNvPr>
+          <p:cNvSpPr>
+            <a:spLocks noGrp="1"/>
+          </p:cNvSpPr>
+          <p:nvPr>
+            <p:ph idx="13"/>
+          </p:nvPr>
+        </p:nvSpPr>
+        <p:spPr>
+          <a:xfrm>
+            <a:off x="508527" y="758907"/>
+            <a:ext cx="11056746" cy="340051"/>
+          </a:xfrm>
+        </p:spPr>
+        <p:txBody>
+          <a:bodyPr>
+            <a:normAutofit/>
+          </a:bodyPr>
+          <a:lstStyle>
+            <a:lvl1pPr marL="0" indent="0" latinLnBrk="0">
+              <a:lnSpc>
+                <a:spcPct val="100000"/>
+              </a:lnSpc>
+              <a:buNone/>
+              <a:defRPr sz="1800" b="1" i="1">
+                <a:solidFill>
+                  <a:schemeClr val="tx1">
+                    <a:lumMod val="50000"/>
+                    <a:lumOff val="50000"/>
+                  </a:schemeClr>
+                </a:solidFill>
+              </a:defRPr>
+            </a:lvl1pPr>
+          </a:lstStyle>
+          <a:p>
+            <a:pPr lvl="0"/>
+            <a:r>
+              <a:rPr kumimoji="1" lang="ko-KR" altLang="en-US" dirty="0"/>
+              <a:t>마스터 텍스트 스타일을 편집하려면 클릭</a:t>
+            </a:r>
           </a:p>
         </p:txBody>
       </p:sp>
@@ -2137,7 +2245,7 @@
           <a:p>
             <a:fld id="{96ECACCA-3741-0D40-A94E-41DBB1D0486F}" type="datetimeFigureOut">
               <a:rPr kumimoji="1" lang="ko-KR" altLang="en-US" smtClean="0"/>
-              <a:t>2026. 8. 16.</a:t>
+              <a:t>2026. 8. 19.</a:t>
             </a:fld>
             <a:endParaRPr kumimoji="1" lang="ko-KR" altLang="en-US"/>
           </a:p>
@@ -2342,7 +2450,7 @@
           <a:p>
             <a:fld id="{96ECACCA-3741-0D40-A94E-41DBB1D0486F}" type="datetimeFigureOut">
               <a:rPr kumimoji="1" lang="ko-KR" altLang="en-US" smtClean="0"/>
-              <a:t>2026. 8. 16.</a:t>
+              <a:t>2026. 8. 19.</a:t>
             </a:fld>
             <a:endParaRPr kumimoji="1" lang="ko-KR" altLang="en-US"/>
           </a:p>
@@ -2620,7 +2728,7 @@
           <a:p>
             <a:fld id="{96ECACCA-3741-0D40-A94E-41DBB1D0486F}" type="datetimeFigureOut">
               <a:rPr kumimoji="1" lang="ko-KR" altLang="en-US" smtClean="0"/>
-              <a:t>2026. 8. 16.</a:t>
+              <a:t>2026. 8. 19.</a:t>
             </a:fld>
             <a:endParaRPr kumimoji="1" lang="ko-KR" altLang="en-US"/>
           </a:p>
@@ -2766,7 +2874,7 @@
           <a:p>
             <a:fld id="{96ECACCA-3741-0D40-A94E-41DBB1D0486F}" type="datetimeFigureOut">
               <a:rPr kumimoji="1" lang="ko-KR" altLang="en-US" smtClean="0"/>
-              <a:t>2026. 8. 16.</a:t>
+              <a:t>2026. 8. 19.</a:t>
             </a:fld>
             <a:endParaRPr kumimoji="1" lang="ko-KR" altLang="en-US"/>
           </a:p>
@@ -2858,7 +2966,7 @@
           <a:p>
             <a:fld id="{96ECACCA-3741-0D40-A94E-41DBB1D0486F}" type="datetimeFigureOut">
               <a:rPr kumimoji="1" lang="ko-KR" altLang="en-US" smtClean="0"/>
-              <a:t>2026. 8. 16.</a:t>
+              <a:t>2026. 8. 19.</a:t>
             </a:fld>
             <a:endParaRPr kumimoji="1" lang="ko-KR" altLang="en-US"/>
           </a:p>
@@ -3102,7 +3210,7 @@
           <a:p>
             <a:fld id="{96ECACCA-3741-0D40-A94E-41DBB1D0486F}" type="datetimeFigureOut">
               <a:rPr kumimoji="1" lang="ko-KR" altLang="en-US" smtClean="0"/>
-              <a:t>2026. 8. 16.</a:t>
+              <a:t>2026. 8. 19.</a:t>
             </a:fld>
             <a:endParaRPr kumimoji="1" lang="ko-KR" altLang="en-US"/>
           </a:p>
@@ -3299,8 +3407,8 @@
         </p:nvSpPr>
         <p:spPr>
           <a:xfrm>
-            <a:off x="720000" y="831617"/>
-            <a:ext cx="10633800" cy="5370215"/>
+            <a:off x="720000" y="946403"/>
+            <a:ext cx="10633800" cy="5255429"/>
           </a:xfrm>
           <a:prstGeom prst="rect">
             <a:avLst/>
@@ -3432,7 +3540,7 @@
           <a:p>
             <a:fld id="{96ECACCA-3741-0D40-A94E-41DBB1D0486F}" type="datetimeFigureOut">
               <a:rPr kumimoji="1" lang="ko-KR" altLang="en-US" smtClean="0"/>
-              <a:t>2026. 8. 16.</a:t>
+              <a:t>2026. 8. 19.</a:t>
             </a:fld>
             <a:endParaRPr kumimoji="1" lang="ko-KR" altLang="en-US"/>
           </a:p>
@@ -3607,7 +3715,7 @@
                   <a:schemeClr val="tx1"/>
                 </a:solidFill>
               </a:rPr>
-              <a:t>/ 22</a:t>
+              <a:t>/ 6</a:t>
             </a:r>
             <a:endParaRPr kumimoji="1" lang="ko-KR" altLang="en-US" sz="1050" dirty="0">
               <a:solidFill>
@@ -4006,6 +4114,129 @@
     <p:extLst>
       <p:ext uri="{BB962C8B-B14F-4D97-AF65-F5344CB8AC3E}">
         <p14:creationId xmlns:p14="http://schemas.microsoft.com/office/powerpoint/2010/main" val="2518634330"/>
+      </p:ext>
+    </p:extLst>
+  </p:cSld>
+  <p:clrMapOvr>
+    <a:masterClrMapping/>
+  </p:clrMapOvr>
+  <mc:AlternateContent xmlns:mc="http://schemas.openxmlformats.org/markup-compatibility/2006" xmlns:p14="http://schemas.microsoft.com/office/powerpoint/2010/main">
+    <mc:Choice Requires="p14">
+      <p:transition p14:dur="250">
+        <p:fade/>
+      </p:transition>
+    </mc:Choice>
+    <mc:Fallback xmlns="">
+      <p:transition>
+        <p:fade/>
+      </p:transition>
+    </mc:Fallback>
+  </mc:AlternateContent>
+</p:sld>
+</file>
+
+<file path=ppt/slides/slide2.xml><?xml version="1.0" encoding="utf-8"?>
+<p:sld xmlns:a="http://schemas.openxmlformats.org/drawingml/2006/main" xmlns:r="http://schemas.openxmlformats.org/officeDocument/2006/relationships" xmlns:p="http://schemas.openxmlformats.org/presentationml/2006/main">
+  <p:cSld>
+    <p:spTree>
+      <p:nvGrpSpPr>
+        <p:cNvPr id="1" name=""/>
+        <p:cNvGrpSpPr/>
+        <p:nvPr/>
+      </p:nvGrpSpPr>
+      <p:grpSpPr>
+        <a:xfrm>
+          <a:off x="0" y="0"/>
+          <a:ext cx="0" cy="0"/>
+          <a:chOff x="0" y="0"/>
+          <a:chExt cx="0" cy="0"/>
+        </a:xfrm>
+      </p:grpSpPr>
+      <p:sp>
+        <p:nvSpPr>
+          <p:cNvPr id="2" name="내용 개체 틀 1">
+            <a:extLst>
+              <a:ext uri="{FF2B5EF4-FFF2-40B4-BE49-F238E27FC236}">
+                <a16:creationId xmlns:a16="http://schemas.microsoft.com/office/drawing/2014/main" id="{10BB0F6A-3DD6-9F11-E4B9-360341CF2A1E}"/>
+              </a:ext>
+            </a:extLst>
+          </p:cNvPr>
+          <p:cNvSpPr>
+            <a:spLocks noGrp="1"/>
+          </p:cNvSpPr>
+          <p:nvPr>
+            <p:ph idx="1"/>
+          </p:nvPr>
+        </p:nvSpPr>
+        <p:spPr/>
+        <p:txBody>
+          <a:bodyPr/>
+          <a:lstStyle/>
+          <a:p>
+            <a:endParaRPr kumimoji="1" lang="ko-KR" altLang="en-US"/>
+          </a:p>
+        </p:txBody>
+      </p:sp>
+      <p:sp>
+        <p:nvSpPr>
+          <p:cNvPr id="3" name="제목 2">
+            <a:extLst>
+              <a:ext uri="{FF2B5EF4-FFF2-40B4-BE49-F238E27FC236}">
+                <a16:creationId xmlns:a16="http://schemas.microsoft.com/office/drawing/2014/main" id="{657F5307-0F67-22BC-A088-1377A8DF3805}"/>
+              </a:ext>
+            </a:extLst>
+          </p:cNvPr>
+          <p:cNvSpPr>
+            <a:spLocks noGrp="1"/>
+          </p:cNvSpPr>
+          <p:nvPr>
+            <p:ph type="title"/>
+          </p:nvPr>
+        </p:nvSpPr>
+        <p:spPr/>
+        <p:txBody>
+          <a:bodyPr/>
+          <a:lstStyle/>
+          <a:p>
+            <a:endParaRPr kumimoji="1" lang="ko-KR" altLang="en-US"/>
+          </a:p>
+        </p:txBody>
+      </p:sp>
+      <p:sp>
+        <p:nvSpPr>
+          <p:cNvPr id="4" name="내용 개체 틀 3">
+            <a:extLst>
+              <a:ext uri="{FF2B5EF4-FFF2-40B4-BE49-F238E27FC236}">
+                <a16:creationId xmlns:a16="http://schemas.microsoft.com/office/drawing/2014/main" id="{AEEA2495-06A5-5C93-B478-85C638D01C6C}"/>
+              </a:ext>
+            </a:extLst>
+          </p:cNvPr>
+          <p:cNvSpPr>
+            <a:spLocks noGrp="1"/>
+          </p:cNvSpPr>
+          <p:nvPr>
+            <p:ph idx="13"/>
+          </p:nvPr>
+        </p:nvSpPr>
+        <p:spPr/>
+        <p:txBody>
+          <a:bodyPr>
+            <a:normAutofit lnSpcReduction="10000"/>
+          </a:bodyPr>
+          <a:lstStyle/>
+          <a:p>
+            <a:r>
+              <a:rPr kumimoji="1" lang="en-US" altLang="ko-KR" dirty="0"/>
+              <a:t>Some subtitle</a:t>
+            </a:r>
+            <a:endParaRPr kumimoji="1" lang="ko-KR" altLang="en-US" dirty="0"/>
+          </a:p>
+        </p:txBody>
+      </p:sp>
+    </p:spTree>
+    <p:extLst>
+      <p:ext uri="{BB962C8B-B14F-4D97-AF65-F5344CB8AC3E}">
+        <p14:creationId xmlns:p14="http://schemas.microsoft.com/office/powerpoint/2010/main" val="941907508"/>
       </p:ext>
     </p:extLst>
   </p:cSld>
